--- a/STI/CellularAutomata/3_presentation/Zwischenstand.pptx
+++ b/STI/CellularAutomata/3_presentation/Zwischenstand.pptx
@@ -900,7 +900,7 @@
           <a:effectLst/>
           <a:extLst>
             <a:ext uri="{91240B29-F687-4f45-9708-019B960494DF}">
-              <a14:hiddenLine xmlns="" xmlns:a14="http://schemas.microsoft.com/office/drawing/2010/main" w="9525">
+              <a14:hiddenLine xmlns:a14="http://schemas.microsoft.com/office/drawing/2010/main" xmlns="" w="9525">
                 <a:solidFill>
                   <a:srgbClr val="000000"/>
                 </a:solidFill>
@@ -2444,7 +2444,7 @@
           <a:ln/>
           <a:extLst>
             <a:ext uri="{91240B29-F687-4f45-9708-019B960494DF}">
-              <a14:hiddenLine xmlns="" xmlns:a14="http://schemas.microsoft.com/office/drawing/2010/main" w="9525">
+              <a14:hiddenLine xmlns:a14="http://schemas.microsoft.com/office/drawing/2010/main" xmlns="" w="9525">
                 <a:solidFill>
                   <a:srgbClr val="000000"/>
                 </a:solidFill>
@@ -2726,7 +2726,7 @@
           <a:ln/>
           <a:extLst>
             <a:ext uri="{91240B29-F687-4f45-9708-019B960494DF}">
-              <a14:hiddenLine xmlns="" xmlns:a14="http://schemas.microsoft.com/office/drawing/2010/main" w="9525">
+              <a14:hiddenLine xmlns:a14="http://schemas.microsoft.com/office/drawing/2010/main" xmlns="" w="9525">
                 <a:solidFill>
                   <a:srgbClr val="000000"/>
                 </a:solidFill>
@@ -3016,7 +3016,7 @@
           <a:ln/>
           <a:extLst>
             <a:ext uri="{91240B29-F687-4f45-9708-019B960494DF}">
-              <a14:hiddenLine xmlns="" xmlns:a14="http://schemas.microsoft.com/office/drawing/2010/main" w="9525">
+              <a14:hiddenLine xmlns:a14="http://schemas.microsoft.com/office/drawing/2010/main" xmlns="" w="9525">
                 <a:solidFill>
                   <a:srgbClr val="000000"/>
                 </a:solidFill>
@@ -3656,7 +3656,7 @@
           <a:ln/>
           <a:extLst>
             <a:ext uri="{91240B29-F687-4f45-9708-019B960494DF}">
-              <a14:hiddenLine xmlns="" xmlns:a14="http://schemas.microsoft.com/office/drawing/2010/main" w="9525">
+              <a14:hiddenLine xmlns:a14="http://schemas.microsoft.com/office/drawing/2010/main" xmlns="" w="9525">
                 <a:solidFill>
                   <a:srgbClr val="000000"/>
                 </a:solidFill>
@@ -4002,7 +4002,7 @@
           <a:ln/>
           <a:extLst>
             <a:ext uri="{91240B29-F687-4f45-9708-019B960494DF}">
-              <a14:hiddenLine xmlns="" xmlns:a14="http://schemas.microsoft.com/office/drawing/2010/main" w="9525">
+              <a14:hiddenLine xmlns:a14="http://schemas.microsoft.com/office/drawing/2010/main" xmlns="" w="9525">
                 <a:solidFill>
                   <a:srgbClr val="000000"/>
                 </a:solidFill>
@@ -4486,7 +4486,7 @@
           <a:ln/>
           <a:extLst>
             <a:ext uri="{91240B29-F687-4f45-9708-019B960494DF}">
-              <a14:hiddenLine xmlns="" xmlns:a14="http://schemas.microsoft.com/office/drawing/2010/main" w="9525">
+              <a14:hiddenLine xmlns:a14="http://schemas.microsoft.com/office/drawing/2010/main" xmlns="" w="9525">
                 <a:solidFill>
                   <a:srgbClr val="000000"/>
                 </a:solidFill>
@@ -4922,7 +4922,7 @@
           <a:ln/>
           <a:extLst>
             <a:ext uri="{91240B29-F687-4f45-9708-019B960494DF}">
-              <a14:hiddenLine xmlns="" xmlns:a14="http://schemas.microsoft.com/office/drawing/2010/main" w="9525">
+              <a14:hiddenLine xmlns:a14="http://schemas.microsoft.com/office/drawing/2010/main" xmlns="" w="9525">
                 <a:solidFill>
                   <a:srgbClr val="000000"/>
                 </a:solidFill>

--- a/STI/CellularAutomata/3_presentation/Zwischenstand.pptx
+++ b/STI/CellularAutomata/3_presentation/Zwischenstand.pptx
@@ -5,15 +5,16 @@
     <p:sldMasterId id="2147483660" r:id="rId1"/>
   </p:sldMasterIdLst>
   <p:notesMasterIdLst>
-    <p:notesMasterId r:id="rId8"/>
+    <p:notesMasterId r:id="rId9"/>
   </p:notesMasterIdLst>
   <p:sldIdLst>
     <p:sldId id="256" r:id="rId2"/>
     <p:sldId id="296" r:id="rId3"/>
     <p:sldId id="294" r:id="rId4"/>
     <p:sldId id="261" r:id="rId5"/>
-    <p:sldId id="295" r:id="rId6"/>
-    <p:sldId id="260" r:id="rId7"/>
+    <p:sldId id="297" r:id="rId6"/>
+    <p:sldId id="295" r:id="rId7"/>
+    <p:sldId id="260" r:id="rId8"/>
   </p:sldIdLst>
   <p:sldSz cx="12192000" cy="6858000"/>
   <p:notesSz cx="6858000" cy="9144000"/>
@@ -202,7 +203,7 @@
           <a:p>
             <a:fld id="{BF27BABE-DFE6-4DB4-AA76-CA6853D56AAE}" type="datetimeFigureOut">
               <a:rPr lang="en-US" smtClean="0"/>
-              <a:t>5/12/2026</a:t>
+              <a:t>5/13/2026</a:t>
             </a:fld>
             <a:endParaRPr lang="en-US"/>
           </a:p>
@@ -538,6 +539,16 @@
           <a:bodyPr/>
           <a:lstStyle/>
           <a:p>
+            <a:r>
+              <a:rPr lang="de-DE"/>
+              <a:t>Bildsrauschen wie salt and pepper noise (weiß/schwarz pixel) durch übertragungs- oder hardwarefehler</a:t>
+            </a:r>
+          </a:p>
+          <a:p>
+            <a:r>
+              <a:rPr lang="de-DE"/>
+              <a:t>Mehrere herangehensweisen das zu lösen</a:t>
+            </a:r>
             <a:endParaRPr lang="en-US"/>
           </a:p>
         </p:txBody>
@@ -637,19 +648,13 @@
           <a:p>
             <a:r>
               <a:rPr lang="en-US"/>
-              <a:t>eindimensional</a:t>
-            </a:r>
-          </a:p>
-          <a:p>
-            <a:r>
-              <a:rPr lang="en-US"/>
-              <a:t>zweidimensional</a:t>
-            </a:r>
-          </a:p>
-          <a:p>
-            <a:r>
-              <a:rPr lang="en-US"/>
-              <a:t>willkürlich gewählte regeln ergeben </a:t>
+              <a:t>Eindimensional definiert alle möglichen nachbarschaften</a:t>
+            </a:r>
+          </a:p>
+          <a:p>
+            <a:r>
+              <a:rPr lang="en-US"/>
+              <a:t>willkürlich gewählte regeln ergeben</a:t>
             </a:r>
           </a:p>
         </p:txBody>
@@ -691,6 +696,93 @@
 </file>
 
 <file path=ppt/notesSlides/notesSlide3.xml><?xml version="1.0" encoding="utf-8"?>
+<p:notes xmlns:a="http://schemas.openxmlformats.org/drawingml/2006/main" xmlns:r="http://schemas.openxmlformats.org/officeDocument/2006/relationships" xmlns:p="http://schemas.openxmlformats.org/presentationml/2006/main">
+  <p:cSld>
+    <p:spTree>
+      <p:nvGrpSpPr>
+        <p:cNvPr id="1" name=""/>
+        <p:cNvGrpSpPr/>
+        <p:nvPr/>
+      </p:nvGrpSpPr>
+      <p:grpSpPr>
+        <a:xfrm>
+          <a:off x="0" y="0"/>
+          <a:ext cx="0" cy="0"/>
+          <a:chOff x="0" y="0"/>
+          <a:chExt cx="0" cy="0"/>
+        </a:xfrm>
+      </p:grpSpPr>
+      <p:sp>
+        <p:nvSpPr>
+          <p:cNvPr id="2" name="Slide Image Placeholder 1"/>
+          <p:cNvSpPr>
+            <a:spLocks noGrp="1" noRot="1" noChangeAspect="1"/>
+          </p:cNvSpPr>
+          <p:nvPr>
+            <p:ph type="sldImg"/>
+          </p:nvPr>
+        </p:nvSpPr>
+        <p:spPr/>
+      </p:sp>
+      <p:sp>
+        <p:nvSpPr>
+          <p:cNvPr id="3" name="Notes Placeholder 2"/>
+          <p:cNvSpPr>
+            <a:spLocks noGrp="1"/>
+          </p:cNvSpPr>
+          <p:nvPr>
+            <p:ph type="body" idx="1"/>
+          </p:nvPr>
+        </p:nvSpPr>
+        <p:spPr/>
+        <p:txBody>
+          <a:bodyPr/>
+          <a:lstStyle/>
+          <a:p>
+            <a:r>
+              <a:rPr lang="de-DE"/>
+              <a:t>Populärste darstellung ist john conways game of life</a:t>
+            </a:r>
+          </a:p>
+        </p:txBody>
+      </p:sp>
+      <p:sp>
+        <p:nvSpPr>
+          <p:cNvPr id="4" name="Slide Number Placeholder 3"/>
+          <p:cNvSpPr>
+            <a:spLocks noGrp="1"/>
+          </p:cNvSpPr>
+          <p:nvPr>
+            <p:ph type="sldNum" sz="quarter" idx="5"/>
+          </p:nvPr>
+        </p:nvSpPr>
+        <p:spPr/>
+        <p:txBody>
+          <a:bodyPr/>
+          <a:lstStyle/>
+          <a:p>
+            <a:fld id="{47F7FE0D-8C76-4AAA-9817-70953D6F4D2E}" type="slidenum">
+              <a:rPr lang="en-US" smtClean="0"/>
+              <a:t>4</a:t>
+            </a:fld>
+            <a:endParaRPr lang="en-US"/>
+          </a:p>
+        </p:txBody>
+      </p:sp>
+    </p:spTree>
+    <p:extLst>
+      <p:ext uri="{BB962C8B-B14F-4D97-AF65-F5344CB8AC3E}">
+        <p14:creationId xmlns:p14="http://schemas.microsoft.com/office/powerpoint/2010/main" val="2006087931"/>
+      </p:ext>
+    </p:extLst>
+  </p:cSld>
+  <p:clrMapOvr>
+    <a:masterClrMapping/>
+  </p:clrMapOvr>
+</p:notes>
+</file>
+
+<file path=ppt/notesSlides/notesSlide4.xml><?xml version="1.0" encoding="utf-8"?>
 <p:notes xmlns:a="http://schemas.openxmlformats.org/drawingml/2006/main" xmlns:r="http://schemas.openxmlformats.org/officeDocument/2006/relationships" xmlns:p="http://schemas.openxmlformats.org/presentationml/2006/main">
   <p:cSld>
     <p:spTree>
@@ -786,7 +878,7 @@
           <a:p>
             <a:fld id="{60D61062-E9D8-4DAB-8118-1CF0D558F973}" type="slidenum">
               <a:rPr lang="en-US" smtClean="0"/>
-              <a:t>5</a:t>
+              <a:t>6</a:t>
             </a:fld>
             <a:endParaRPr lang="en-US"/>
           </a:p>
@@ -900,7 +992,7 @@
           <a:effectLst/>
           <a:extLst>
             <a:ext uri="{91240B29-F687-4f45-9708-019B960494DF}">
-              <a14:hiddenLine xmlns:a14="http://schemas.microsoft.com/office/drawing/2010/main" xmlns="" w="9525">
+              <a14:hiddenLine xmlns="" xmlns:a14="http://schemas.microsoft.com/office/drawing/2010/main" w="9525">
                 <a:solidFill>
                   <a:srgbClr val="000000"/>
                 </a:solidFill>
@@ -1099,7 +1191,7 @@
           <a:p>
             <a:fld id="{8501C9F1-A044-4B44-84F3-9EEE0D898BBD}" type="datetimeFigureOut">
               <a:rPr lang="en-US" smtClean="0"/>
-              <a:t>5/12/2026</a:t>
+              <a:t>5/13/2026</a:t>
             </a:fld>
             <a:endParaRPr lang="en-US"/>
           </a:p>
@@ -1418,7 +1510,7 @@
           <a:p>
             <a:fld id="{8501C9F1-A044-4B44-84F3-9EEE0D898BBD}" type="datetimeFigureOut">
               <a:rPr lang="en-US" smtClean="0"/>
-              <a:t>5/12/2026</a:t>
+              <a:t>5/13/2026</a:t>
             </a:fld>
             <a:endParaRPr lang="en-US"/>
           </a:p>
@@ -1913,7 +2005,7 @@
           <a:p>
             <a:fld id="{8501C9F1-A044-4B44-84F3-9EEE0D898BBD}" type="datetimeFigureOut">
               <a:rPr lang="en-US" smtClean="0"/>
-              <a:t>5/12/2026</a:t>
+              <a:t>5/13/2026</a:t>
             </a:fld>
             <a:endParaRPr lang="en-US"/>
           </a:p>
@@ -2289,7 +2381,7 @@
           <a:p>
             <a:fld id="{8501C9F1-A044-4B44-84F3-9EEE0D898BBD}" type="datetimeFigureOut">
               <a:rPr lang="en-US" smtClean="0"/>
-              <a:t>5/12/2026</a:t>
+              <a:t>5/13/2026</a:t>
             </a:fld>
             <a:endParaRPr lang="en-US"/>
           </a:p>
@@ -2444,7 +2536,7 @@
           <a:ln/>
           <a:extLst>
             <a:ext uri="{91240B29-F687-4f45-9708-019B960494DF}">
-              <a14:hiddenLine xmlns:a14="http://schemas.microsoft.com/office/drawing/2010/main" xmlns="" w="9525">
+              <a14:hiddenLine xmlns="" xmlns:a14="http://schemas.microsoft.com/office/drawing/2010/main" w="9525">
                 <a:solidFill>
                   <a:srgbClr val="000000"/>
                 </a:solidFill>
@@ -2569,7 +2661,7 @@
           <a:p>
             <a:fld id="{8501C9F1-A044-4B44-84F3-9EEE0D898BBD}" type="datetimeFigureOut">
               <a:rPr lang="en-US" smtClean="0"/>
-              <a:t>5/12/2026</a:t>
+              <a:t>5/13/2026</a:t>
             </a:fld>
             <a:endParaRPr lang="en-US"/>
           </a:p>
@@ -2726,7 +2818,7 @@
           <a:ln/>
           <a:extLst>
             <a:ext uri="{91240B29-F687-4f45-9708-019B960494DF}">
-              <a14:hiddenLine xmlns:a14="http://schemas.microsoft.com/office/drawing/2010/main" xmlns="" w="9525">
+              <a14:hiddenLine xmlns="" xmlns:a14="http://schemas.microsoft.com/office/drawing/2010/main" w="9525">
                 <a:solidFill>
                   <a:srgbClr val="000000"/>
                 </a:solidFill>
@@ -2861,7 +2953,7 @@
           <a:p>
             <a:fld id="{8501C9F1-A044-4B44-84F3-9EEE0D898BBD}" type="datetimeFigureOut">
               <a:rPr lang="en-US" smtClean="0"/>
-              <a:t>5/12/2026</a:t>
+              <a:t>5/13/2026</a:t>
             </a:fld>
             <a:endParaRPr lang="en-US"/>
           </a:p>
@@ -3016,7 +3108,7 @@
           <a:ln/>
           <a:extLst>
             <a:ext uri="{91240B29-F687-4f45-9708-019B960494DF}">
-              <a14:hiddenLine xmlns:a14="http://schemas.microsoft.com/office/drawing/2010/main" xmlns="" w="9525">
+              <a14:hiddenLine xmlns="" xmlns:a14="http://schemas.microsoft.com/office/drawing/2010/main" w="9525">
                 <a:solidFill>
                   <a:srgbClr val="000000"/>
                 </a:solidFill>
@@ -3151,7 +3243,7 @@
           <a:p>
             <a:fld id="{8501C9F1-A044-4B44-84F3-9EEE0D898BBD}" type="datetimeFigureOut">
               <a:rPr lang="en-US" smtClean="0"/>
-              <a:t>5/12/2026</a:t>
+              <a:t>5/13/2026</a:t>
             </a:fld>
             <a:endParaRPr lang="en-US"/>
           </a:p>
@@ -3501,7 +3593,7 @@
           <a:p>
             <a:fld id="{8501C9F1-A044-4B44-84F3-9EEE0D898BBD}" type="datetimeFigureOut">
               <a:rPr lang="en-US" smtClean="0"/>
-              <a:t>5/12/2026</a:t>
+              <a:t>5/13/2026</a:t>
             </a:fld>
             <a:endParaRPr lang="en-US"/>
           </a:p>
@@ -3656,7 +3748,7 @@
           <a:ln/>
           <a:extLst>
             <a:ext uri="{91240B29-F687-4f45-9708-019B960494DF}">
-              <a14:hiddenLine xmlns:a14="http://schemas.microsoft.com/office/drawing/2010/main" xmlns="" w="9525">
+              <a14:hiddenLine xmlns="" xmlns:a14="http://schemas.microsoft.com/office/drawing/2010/main" w="9525">
                 <a:solidFill>
                   <a:srgbClr val="000000"/>
                 </a:solidFill>
@@ -3847,7 +3939,7 @@
           <a:p>
             <a:fld id="{8501C9F1-A044-4B44-84F3-9EEE0D898BBD}" type="datetimeFigureOut">
               <a:rPr lang="en-US" smtClean="0"/>
-              <a:t>5/12/2026</a:t>
+              <a:t>5/13/2026</a:t>
             </a:fld>
             <a:endParaRPr lang="en-US"/>
           </a:p>
@@ -4002,7 +4094,7 @@
           <a:ln/>
           <a:extLst>
             <a:ext uri="{91240B29-F687-4f45-9708-019B960494DF}">
-              <a14:hiddenLine xmlns:a14="http://schemas.microsoft.com/office/drawing/2010/main" xmlns="" w="9525">
+              <a14:hiddenLine xmlns="" xmlns:a14="http://schemas.microsoft.com/office/drawing/2010/main" w="9525">
                 <a:solidFill>
                   <a:srgbClr val="000000"/>
                 </a:solidFill>
@@ -4331,7 +4423,7 @@
           <a:p>
             <a:fld id="{8501C9F1-A044-4B44-84F3-9EEE0D898BBD}" type="datetimeFigureOut">
               <a:rPr lang="en-US" smtClean="0"/>
-              <a:t>5/12/2026</a:t>
+              <a:t>5/13/2026</a:t>
             </a:fld>
             <a:endParaRPr lang="en-US"/>
           </a:p>
@@ -4486,7 +4578,7 @@
           <a:ln/>
           <a:extLst>
             <a:ext uri="{91240B29-F687-4f45-9708-019B960494DF}">
-              <a14:hiddenLine xmlns:a14="http://schemas.microsoft.com/office/drawing/2010/main" xmlns="" w="9525">
+              <a14:hiddenLine xmlns="" xmlns:a14="http://schemas.microsoft.com/office/drawing/2010/main" w="9525">
                 <a:solidFill>
                   <a:srgbClr val="000000"/>
                 </a:solidFill>
@@ -4559,7 +4651,7 @@
           <a:p>
             <a:fld id="{8501C9F1-A044-4B44-84F3-9EEE0D898BBD}" type="datetimeFigureOut">
               <a:rPr lang="en-US" smtClean="0"/>
-              <a:t>5/12/2026</a:t>
+              <a:t>5/13/2026</a:t>
             </a:fld>
             <a:endParaRPr lang="en-US"/>
           </a:p>
@@ -4654,7 +4746,7 @@
           <a:p>
             <a:fld id="{8501C9F1-A044-4B44-84F3-9EEE0D898BBD}" type="datetimeFigureOut">
               <a:rPr lang="en-US" smtClean="0"/>
-              <a:t>5/12/2026</a:t>
+              <a:t>5/13/2026</a:t>
             </a:fld>
             <a:endParaRPr lang="en-US"/>
           </a:p>
@@ -4922,7 +5014,7 @@
           <a:ln/>
           <a:extLst>
             <a:ext uri="{91240B29-F687-4f45-9708-019B960494DF}">
-              <a14:hiddenLine xmlns:a14="http://schemas.microsoft.com/office/drawing/2010/main" xmlns="" w="9525">
+              <a14:hiddenLine xmlns="" xmlns:a14="http://schemas.microsoft.com/office/drawing/2010/main" w="9525">
                 <a:solidFill>
                   <a:srgbClr val="000000"/>
                 </a:solidFill>
@@ -5128,7 +5220,7 @@
           <a:p>
             <a:fld id="{8501C9F1-A044-4B44-84F3-9EEE0D898BBD}" type="datetimeFigureOut">
               <a:rPr lang="en-US" smtClean="0"/>
-              <a:t>5/12/2026</a:t>
+              <a:t>5/13/2026</a:t>
             </a:fld>
             <a:endParaRPr lang="en-US"/>
           </a:p>
@@ -5440,7 +5532,7 @@
           <a:p>
             <a:fld id="{8501C9F1-A044-4B44-84F3-9EEE0D898BBD}" type="datetimeFigureOut">
               <a:rPr lang="en-US" smtClean="0"/>
-              <a:t>5/12/2026</a:t>
+              <a:t>5/13/2026</a:t>
             </a:fld>
             <a:endParaRPr lang="en-US"/>
           </a:p>
@@ -5712,7 +5804,7 @@
           <a:p>
             <a:fld id="{8501C9F1-A044-4B44-84F3-9EEE0D898BBD}" type="datetimeFigureOut">
               <a:rPr lang="en-US" smtClean="0"/>
-              <a:t>5/12/2026</a:t>
+              <a:t>5/13/2026</a:t>
             </a:fld>
             <a:endParaRPr lang="en-US"/>
           </a:p>
@@ -6723,8 +6815,8 @@
         </p:nvSpPr>
         <p:spPr>
           <a:xfrm>
-            <a:off x="3495148" y="4104598"/>
-            <a:ext cx="5201700" cy="1701684"/>
+            <a:off x="3216804" y="3806886"/>
+            <a:ext cx="5758387" cy="2117183"/>
           </a:xfrm>
           <a:prstGeom prst="rect">
             <a:avLst/>
@@ -6746,6 +6838,19 @@
             </a:pPr>
             <a:r>
               <a:rPr lang="en-US"/>
+              <a:t>Beispiel Noise Filter</a:t>
+            </a:r>
+          </a:p>
+          <a:p>
+            <a:pPr marL="742950" lvl="1" indent="-285750">
+              <a:lnSpc>
+                <a:spcPct val="150000"/>
+              </a:lnSpc>
+              <a:buFont typeface="Arial" panose="020B0604020202020204" pitchFamily="34" charset="0"/>
+              <a:buChar char="•"/>
+            </a:pPr>
+            <a:r>
+              <a:rPr lang="en-US"/>
               <a:t>Mean Filter ist ein </a:t>
             </a:r>
             <a:r>
@@ -6758,7 +6863,7 @@
             </a:r>
           </a:p>
           <a:p>
-            <a:pPr marL="285750" indent="-285750">
+            <a:pPr marL="742950" lvl="1" indent="-285750">
               <a:lnSpc>
                 <a:spcPct val="150000"/>
               </a:lnSpc>
@@ -7759,7 +7864,7 @@
           <p:nvPr/>
         </p:nvPicPr>
         <p:blipFill>
-          <a:blip r:embed="rId2">
+          <a:blip r:embed="rId3">
             <a:extLst>
               <a:ext uri="{28A0092B-C50C-407E-A947-70E740481C1C}">
                 <a14:useLocalDpi xmlns:a14="http://schemas.microsoft.com/office/drawing/2010/main" val="0"/>
@@ -7831,8 +7936,8 @@
         </p:nvSpPr>
         <p:spPr>
           <a:xfrm>
-            <a:off x="7177336" y="1331948"/>
-            <a:ext cx="4062163" cy="3779176"/>
+            <a:off x="7038864" y="1124199"/>
+            <a:ext cx="4062163" cy="4194674"/>
           </a:xfrm>
           <a:prstGeom prst="rect">
             <a:avLst/>
@@ -7969,7 +8074,7 @@
                   <a:schemeClr val="accent6"/>
                 </a:solidFill>
               </a:rPr>
-              <a:t>simplem aber effektivem Noise Filtering</a:t>
+              <a:t>simplen aber effektiven Noise Filtering Algorithmen</a:t>
             </a:r>
           </a:p>
         </p:txBody>
@@ -8028,6 +8133,85 @@
 </file>
 
 <file path=ppt/slides/slide5.xml><?xml version="1.0" encoding="utf-8"?>
+<p:sld xmlns:a="http://schemas.openxmlformats.org/drawingml/2006/main" xmlns:r="http://schemas.openxmlformats.org/officeDocument/2006/relationships" xmlns:p="http://schemas.openxmlformats.org/presentationml/2006/main" showMasterSp="0">
+  <p:cSld>
+    <p:bg>
+      <p:bgPr>
+        <a:pattFill prst="wdUpDiag">
+          <a:fgClr>
+            <a:schemeClr val="bg2"/>
+          </a:fgClr>
+          <a:bgClr>
+            <a:schemeClr val="bg1"/>
+          </a:bgClr>
+        </a:pattFill>
+        <a:effectLst/>
+      </p:bgPr>
+    </p:bg>
+    <p:spTree>
+      <p:nvGrpSpPr>
+        <p:cNvPr id="1" name=""/>
+        <p:cNvGrpSpPr/>
+        <p:nvPr/>
+      </p:nvGrpSpPr>
+      <p:grpSpPr>
+        <a:xfrm>
+          <a:off x="0" y="0"/>
+          <a:ext cx="0" cy="0"/>
+          <a:chOff x="0" y="0"/>
+          <a:chExt cx="0" cy="0"/>
+        </a:xfrm>
+      </p:grpSpPr>
+      <p:sp>
+        <p:nvSpPr>
+          <p:cNvPr id="3" name="Content Placeholder 2">
+            <a:extLst>
+              <a:ext uri="{FF2B5EF4-FFF2-40B4-BE49-F238E27FC236}">
+                <a16:creationId xmlns:a16="http://schemas.microsoft.com/office/drawing/2014/main" id="{DD768136-EA87-06B0-8960-9761DE331859}"/>
+              </a:ext>
+            </a:extLst>
+          </p:cNvPr>
+          <p:cNvSpPr>
+            <a:spLocks noGrp="1"/>
+          </p:cNvSpPr>
+          <p:nvPr>
+            <p:ph idx="1"/>
+          </p:nvPr>
+        </p:nvSpPr>
+        <p:spPr>
+          <a:xfrm>
+            <a:off x="1749057" y="2387050"/>
+            <a:ext cx="8693886" cy="2083899"/>
+          </a:xfrm>
+        </p:spPr>
+        <p:txBody>
+          <a:bodyPr/>
+          <a:lstStyle/>
+          <a:p>
+            <a:pPr marL="0" indent="0" algn="ctr">
+              <a:buNone/>
+            </a:pPr>
+            <a:r>
+              <a:rPr lang="en-US"/>
+              <a:t>Ziel der Arbeit ist die Beleuchtung der Herangehensweise an und der Vergleich von CA-basierten Noise Filtern aus einer Sammlung an Studien, welche zwischen 2001 und 2025 publiziert wurden</a:t>
+            </a:r>
+          </a:p>
+        </p:txBody>
+      </p:sp>
+    </p:spTree>
+    <p:extLst>
+      <p:ext uri="{BB962C8B-B14F-4D97-AF65-F5344CB8AC3E}">
+        <p14:creationId xmlns:p14="http://schemas.microsoft.com/office/powerpoint/2010/main" val="874698432"/>
+      </p:ext>
+    </p:extLst>
+  </p:cSld>
+  <p:clrMapOvr>
+    <a:masterClrMapping/>
+  </p:clrMapOvr>
+</p:sld>
+</file>
+
+<file path=ppt/slides/slide6.xml><?xml version="1.0" encoding="utf-8"?>
 <p:sld xmlns:a="http://schemas.openxmlformats.org/drawingml/2006/main" xmlns:r="http://schemas.openxmlformats.org/officeDocument/2006/relationships" xmlns:p="http://schemas.openxmlformats.org/presentationml/2006/main" showMasterSp="0">
   <p:cSld>
     <p:bg>
@@ -8549,7 +8733,7 @@
 </p:sld>
 </file>
 
-<file path=ppt/slides/slide6.xml><?xml version="1.0" encoding="utf-8"?>
+<file path=ppt/slides/slide7.xml><?xml version="1.0" encoding="utf-8"?>
 <p:sld xmlns:a="http://schemas.openxmlformats.org/drawingml/2006/main" xmlns:r="http://schemas.openxmlformats.org/officeDocument/2006/relationships" xmlns:p="http://schemas.openxmlformats.org/presentationml/2006/main" showMasterSp="0">
   <p:cSld>
     <p:bg>
@@ -8792,7 +8976,7 @@
           <a:p>
             <a:r>
               <a:rPr lang="en-US" sz="1400"/>
-              <a:t>Neustes Werk von 2025</a:t>
+              <a:t>Neustes Werk von 2025 (2026)</a:t>
             </a:r>
           </a:p>
         </p:txBody>
@@ -8925,7 +9109,7 @@
                   <a:ea typeface="Times New Roman" panose="02020603050405020304" pitchFamily="18" charset="0"/>
                   <a:cs typeface="Times New Roman" panose="02020603050405020304" pitchFamily="18" charset="0"/>
                 </a:rPr>
-                <a:t>(Einstiegs-) Literatur</a:t>
+                <a:t>Einstiegsliteratur</a:t>
               </a:r>
               <a:endParaRPr lang="en-US" sz="1400">
                 <a:effectLst/>
